--- a/hs-web/W12_HTML5_DOM_활용.pptx
+++ b/hs-web/W12_HTML5_DOM_활용.pptx
@@ -28092,727 +28092,30 @@
           </a:p>
         </p:txBody>
       </p:sp>
-      <p:sp>
-        <p:nvSpPr>
-          <p:cNvPr id="11" name="deckgen:code"/>
-          <p:cNvSpPr txBox="1"/>
-          <p:nvPr/>
-        </p:nvSpPr>
+      <p:pic>
+        <p:nvPicPr>
+          <p:cNvPr id="11" name="deckgen:code-art" descr="image.png"/>
+          <p:cNvPicPr>
+            <a:picLocks noChangeAspect="1"/>
+          </p:cNvPicPr>
+          <p:nvPr/>
+        </p:nvPicPr>
+        <p:blipFill>
+          <a:blip r:embed="rId2"/>
+          <a:stretch>
+            <a:fillRect/>
+          </a:stretch>
+        </p:blipFill>
         <p:spPr>
           <a:xfrm>
             <a:off x="2038350" y="2552700"/>
-            <a:ext cx="14897100" cy="5105400"/>
-          </a:xfrm>
-          <a:prstGeom prst="rect">
-            <a:avLst/>
-          </a:prstGeom>
-          <a:noFill/>
-        </p:spPr>
-        <p:txBody>
-          <a:bodyPr wrap="none" lIns="0" rIns="0" tIns="0" bIns="0" anchor="t">
-            <a:spAutoFit/>
-          </a:bodyPr>
-          <a:lstStyle/>
-          <a:p>
-            <a:pPr algn="l">
-              <a:lnSpc>
-                <a:spcPct val="115000"/>
-              </a:lnSpc>
-            </a:pPr>
-            <a:r>
-              <a:rPr sz="1575" b="0">
-                <a:solidFill>
-                  <a:srgbClr val="8F9DB5"/>
-                </a:solidFill>
-                <a:latin typeface="나눔고딕코딩"/>
-                <a:ea typeface="나눔고딕코딩"/>
-                <a:cs typeface="나눔고딕코딩"/>
-              </a:rPr>
-              <a:t>&lt;!-- HTML 파일 --&gt;</a:t>
-            </a:r>
-          </a:p>
-          <a:p>
-            <a:pPr algn="l">
-              <a:lnSpc>
-                <a:spcPct val="115000"/>
-              </a:lnSpc>
-            </a:pPr>
-            <a:r>
-              <a:rPr sz="1575" b="0">
-                <a:solidFill>
-                  <a:srgbClr val="8ABFFF"/>
-                </a:solidFill>
-                <a:latin typeface="나눔고딕코딩"/>
-                <a:ea typeface="나눔고딕코딩"/>
-                <a:cs typeface="나눔고딕코딩"/>
-              </a:rPr>
-              <a:t>&lt;body</a:t>
-            </a:r>
-            <a:r>
-              <a:rPr sz="1575" b="0">
-                <a:solidFill>
-                  <a:srgbClr val="8ABFFF"/>
-                </a:solidFill>
-                <a:latin typeface="나눔고딕코딩"/>
-                <a:ea typeface="나눔고딕코딩"/>
-                <a:cs typeface="나눔고딕코딩"/>
-              </a:rPr>
-              <a:t>&gt;</a:t>
-            </a:r>
-          </a:p>
-          <a:p>
-            <a:pPr algn="l">
-              <a:lnSpc>
-                <a:spcPct val="115000"/>
-              </a:lnSpc>
-            </a:pPr>
-            <a:r>
-              <a:rPr sz="1575" b="0">
-                <a:solidFill>
-                  <a:srgbClr val="E6EAF2"/>
-                </a:solidFill>
-                <a:latin typeface="나눔고딕코딩"/>
-                <a:ea typeface="나눔고딕코딩"/>
-                <a:cs typeface="나눔고딕코딩"/>
-              </a:rPr>
-              <a:t>  </a:t>
-            </a:r>
-            <a:r>
-              <a:rPr sz="1575" b="0">
-                <a:solidFill>
-                  <a:srgbClr val="8ABFFF"/>
-                </a:solidFill>
-                <a:latin typeface="나눔고딕코딩"/>
-                <a:ea typeface="나눔고딕코딩"/>
-                <a:cs typeface="나눔고딕코딩"/>
-              </a:rPr>
-              <a:t>&lt;h1</a:t>
-            </a:r>
-            <a:r>
-              <a:rPr sz="1575" b="0">
-                <a:solidFill>
-                  <a:srgbClr val="E6EAF2"/>
-                </a:solidFill>
-                <a:latin typeface="나눔고딕코딩"/>
-                <a:ea typeface="나눔고딕코딩"/>
-                <a:cs typeface="나눔고딕코딩"/>
-              </a:rPr>
-              <a:t> </a:t>
-            </a:r>
-            <a:r>
-              <a:rPr sz="1575" b="0">
-                <a:solidFill>
-                  <a:srgbClr val="9FE8C0"/>
-                </a:solidFill>
-                <a:latin typeface="나눔고딕코딩"/>
-                <a:ea typeface="나눔고딕코딩"/>
-                <a:cs typeface="나눔고딕코딩"/>
-              </a:rPr>
-              <a:t>id</a:t>
-            </a:r>
-            <a:r>
-              <a:rPr sz="1575" b="0">
-                <a:solidFill>
-                  <a:srgbClr val="E6EAF2"/>
-                </a:solidFill>
-                <a:latin typeface="나눔고딕코딩"/>
-                <a:ea typeface="나눔고딕코딩"/>
-                <a:cs typeface="나눔고딕코딩"/>
-              </a:rPr>
-              <a:t>=</a:t>
-            </a:r>
-            <a:r>
-              <a:rPr sz="1575" b="0">
-                <a:solidFill>
-                  <a:srgbClr val="F5C97A"/>
-                </a:solidFill>
-                <a:latin typeface="나눔고딕코딩"/>
-                <a:ea typeface="나눔고딕코딩"/>
-                <a:cs typeface="나눔고딕코딩"/>
-              </a:rPr>
-              <a:t>"title"</a:t>
-            </a:r>
-            <a:r>
-              <a:rPr sz="1575" b="0">
-                <a:solidFill>
-                  <a:srgbClr val="8ABFFF"/>
-                </a:solidFill>
-                <a:latin typeface="나눔고딕코딩"/>
-                <a:ea typeface="나눔고딕코딩"/>
-                <a:cs typeface="나눔고딕코딩"/>
-              </a:rPr>
-              <a:t>&gt;</a:t>
-            </a:r>
-            <a:r>
-              <a:rPr sz="1575" b="0">
-                <a:solidFill>
-                  <a:srgbClr val="E6EAF2"/>
-                </a:solidFill>
-                <a:latin typeface="나눔고딕코딩"/>
-                <a:ea typeface="나눔고딕코딩"/>
-                <a:cs typeface="나눔고딕코딩"/>
-              </a:rPr>
-              <a:t>제목</a:t>
-            </a:r>
-            <a:r>
-              <a:rPr sz="1575" b="0">
-                <a:solidFill>
-                  <a:srgbClr val="8ABFFF"/>
-                </a:solidFill>
-                <a:latin typeface="나눔고딕코딩"/>
-                <a:ea typeface="나눔고딕코딩"/>
-                <a:cs typeface="나눔고딕코딩"/>
-              </a:rPr>
-              <a:t>&lt;/h1</a:t>
-            </a:r>
-            <a:r>
-              <a:rPr sz="1575" b="0">
-                <a:solidFill>
-                  <a:srgbClr val="8ABFFF"/>
-                </a:solidFill>
-                <a:latin typeface="나눔고딕코딩"/>
-                <a:ea typeface="나눔고딕코딩"/>
-                <a:cs typeface="나눔고딕코딩"/>
-              </a:rPr>
-              <a:t>&gt;</a:t>
-            </a:r>
-          </a:p>
-          <a:p>
-            <a:pPr algn="l">
-              <a:lnSpc>
-                <a:spcPct val="115000"/>
-              </a:lnSpc>
-            </a:pPr>
-            <a:r>
-              <a:rPr sz="1575" b="0">
-                <a:solidFill>
-                  <a:srgbClr val="E6EAF2"/>
-                </a:solidFill>
-                <a:latin typeface="나눔고딕코딩"/>
-                <a:ea typeface="나눔고딕코딩"/>
-                <a:cs typeface="나눔고딕코딩"/>
-              </a:rPr>
-              <a:t>  </a:t>
-            </a:r>
-            <a:r>
-              <a:rPr sz="1575" b="0">
-                <a:solidFill>
-                  <a:srgbClr val="8ABFFF"/>
-                </a:solidFill>
-                <a:latin typeface="나눔고딕코딩"/>
-                <a:ea typeface="나눔고딕코딩"/>
-                <a:cs typeface="나눔고딕코딩"/>
-              </a:rPr>
-              <a:t>&lt;ul</a:t>
-            </a:r>
-            <a:r>
-              <a:rPr sz="1575" b="0">
-                <a:solidFill>
-                  <a:srgbClr val="E6EAF2"/>
-                </a:solidFill>
-                <a:latin typeface="나눔고딕코딩"/>
-                <a:ea typeface="나눔고딕코딩"/>
-                <a:cs typeface="나눔고딕코딩"/>
-              </a:rPr>
-              <a:t> </a:t>
-            </a:r>
-            <a:r>
-              <a:rPr sz="1575" b="0">
-                <a:solidFill>
-                  <a:srgbClr val="9FE8C0"/>
-                </a:solidFill>
-                <a:latin typeface="나눔고딕코딩"/>
-                <a:ea typeface="나눔고딕코딩"/>
-                <a:cs typeface="나눔고딕코딩"/>
-              </a:rPr>
-              <a:t>class</a:t>
-            </a:r>
-            <a:r>
-              <a:rPr sz="1575" b="0">
-                <a:solidFill>
-                  <a:srgbClr val="E6EAF2"/>
-                </a:solidFill>
-                <a:latin typeface="나눔고딕코딩"/>
-                <a:ea typeface="나눔고딕코딩"/>
-                <a:cs typeface="나눔고딕코딩"/>
-              </a:rPr>
-              <a:t>=</a:t>
-            </a:r>
-            <a:r>
-              <a:rPr sz="1575" b="0">
-                <a:solidFill>
-                  <a:srgbClr val="F5C97A"/>
-                </a:solidFill>
-                <a:latin typeface="나눔고딕코딩"/>
-                <a:ea typeface="나눔고딕코딩"/>
-                <a:cs typeface="나눔고딕코딩"/>
-              </a:rPr>
-              <a:t>"list"</a:t>
-            </a:r>
-            <a:r>
-              <a:rPr sz="1575" b="0">
-                <a:solidFill>
-                  <a:srgbClr val="8ABFFF"/>
-                </a:solidFill>
-                <a:latin typeface="나눔고딕코딩"/>
-                <a:ea typeface="나눔고딕코딩"/>
-                <a:cs typeface="나눔고딕코딩"/>
-              </a:rPr>
-              <a:t>&gt;</a:t>
-            </a:r>
-          </a:p>
-          <a:p>
-            <a:pPr algn="l">
-              <a:lnSpc>
-                <a:spcPct val="115000"/>
-              </a:lnSpc>
-            </a:pPr>
-            <a:r>
-              <a:rPr sz="1575" b="0">
-                <a:solidFill>
-                  <a:srgbClr val="E6EAF2"/>
-                </a:solidFill>
-                <a:latin typeface="나눔고딕코딩"/>
-                <a:ea typeface="나눔고딕코딩"/>
-                <a:cs typeface="나눔고딕코딩"/>
-              </a:rPr>
-              <a:t>    </a:t>
-            </a:r>
-            <a:r>
-              <a:rPr sz="1575" b="0">
-                <a:solidFill>
-                  <a:srgbClr val="8ABFFF"/>
-                </a:solidFill>
-                <a:latin typeface="나눔고딕코딩"/>
-                <a:ea typeface="나눔고딕코딩"/>
-                <a:cs typeface="나눔고딕코딩"/>
-              </a:rPr>
-              <a:t>&lt;li</a:t>
-            </a:r>
-            <a:r>
-              <a:rPr sz="1575" b="0">
-                <a:solidFill>
-                  <a:srgbClr val="8ABFFF"/>
-                </a:solidFill>
-                <a:latin typeface="나눔고딕코딩"/>
-                <a:ea typeface="나눔고딕코딩"/>
-                <a:cs typeface="나눔고딕코딩"/>
-              </a:rPr>
-              <a:t>&gt;</a:t>
-            </a:r>
-            <a:r>
-              <a:rPr sz="1575" b="0">
-                <a:solidFill>
-                  <a:srgbClr val="E6EAF2"/>
-                </a:solidFill>
-                <a:latin typeface="나눔고딕코딩"/>
-                <a:ea typeface="나눔고딕코딩"/>
-                <a:cs typeface="나눔고딕코딩"/>
-              </a:rPr>
-              <a:t>하나</a:t>
-            </a:r>
-            <a:r>
-              <a:rPr sz="1575" b="0">
-                <a:solidFill>
-                  <a:srgbClr val="8ABFFF"/>
-                </a:solidFill>
-                <a:latin typeface="나눔고딕코딩"/>
-                <a:ea typeface="나눔고딕코딩"/>
-                <a:cs typeface="나눔고딕코딩"/>
-              </a:rPr>
-              <a:t>&lt;/li</a:t>
-            </a:r>
-            <a:r>
-              <a:rPr sz="1575" b="0">
-                <a:solidFill>
-                  <a:srgbClr val="8ABFFF"/>
-                </a:solidFill>
-                <a:latin typeface="나눔고딕코딩"/>
-                <a:ea typeface="나눔고딕코딩"/>
-                <a:cs typeface="나눔고딕코딩"/>
-              </a:rPr>
-              <a:t>&gt;</a:t>
-            </a:r>
-          </a:p>
-          <a:p>
-            <a:pPr algn="l">
-              <a:lnSpc>
-                <a:spcPct val="115000"/>
-              </a:lnSpc>
-            </a:pPr>
-            <a:r>
-              <a:rPr sz="1575" b="0">
-                <a:solidFill>
-                  <a:srgbClr val="E6EAF2"/>
-                </a:solidFill>
-                <a:latin typeface="나눔고딕코딩"/>
-                <a:ea typeface="나눔고딕코딩"/>
-                <a:cs typeface="나눔고딕코딩"/>
-              </a:rPr>
-              <a:t>    </a:t>
-            </a:r>
-            <a:r>
-              <a:rPr sz="1575" b="0">
-                <a:solidFill>
-                  <a:srgbClr val="8ABFFF"/>
-                </a:solidFill>
-                <a:latin typeface="나눔고딕코딩"/>
-                <a:ea typeface="나눔고딕코딩"/>
-                <a:cs typeface="나눔고딕코딩"/>
-              </a:rPr>
-              <a:t>&lt;li</a:t>
-            </a:r>
-            <a:r>
-              <a:rPr sz="1575" b="0">
-                <a:solidFill>
-                  <a:srgbClr val="8ABFFF"/>
-                </a:solidFill>
-                <a:latin typeface="나눔고딕코딩"/>
-                <a:ea typeface="나눔고딕코딩"/>
-                <a:cs typeface="나눔고딕코딩"/>
-              </a:rPr>
-              <a:t>&gt;</a:t>
-            </a:r>
-            <a:r>
-              <a:rPr sz="1575" b="0">
-                <a:solidFill>
-                  <a:srgbClr val="E6EAF2"/>
-                </a:solidFill>
-                <a:latin typeface="나눔고딕코딩"/>
-                <a:ea typeface="나눔고딕코딩"/>
-                <a:cs typeface="나눔고딕코딩"/>
-              </a:rPr>
-              <a:t>둘</a:t>
-            </a:r>
-            <a:r>
-              <a:rPr sz="1575" b="0">
-                <a:solidFill>
-                  <a:srgbClr val="8ABFFF"/>
-                </a:solidFill>
-                <a:latin typeface="나눔고딕코딩"/>
-                <a:ea typeface="나눔고딕코딩"/>
-                <a:cs typeface="나눔고딕코딩"/>
-              </a:rPr>
-              <a:t>&lt;/li</a:t>
-            </a:r>
-            <a:r>
-              <a:rPr sz="1575" b="0">
-                <a:solidFill>
-                  <a:srgbClr val="8ABFFF"/>
-                </a:solidFill>
-                <a:latin typeface="나눔고딕코딩"/>
-                <a:ea typeface="나눔고딕코딩"/>
-                <a:cs typeface="나눔고딕코딩"/>
-              </a:rPr>
-              <a:t>&gt;</a:t>
-            </a:r>
-          </a:p>
-          <a:p>
-            <a:pPr algn="l">
-              <a:lnSpc>
-                <a:spcPct val="115000"/>
-              </a:lnSpc>
-            </a:pPr>
-            <a:r>
-              <a:rPr sz="1575" b="0">
-                <a:solidFill>
-                  <a:srgbClr val="E6EAF2"/>
-                </a:solidFill>
-                <a:latin typeface="나눔고딕코딩"/>
-                <a:ea typeface="나눔고딕코딩"/>
-                <a:cs typeface="나눔고딕코딩"/>
-              </a:rPr>
-              <a:t>  </a:t>
-            </a:r>
-            <a:r>
-              <a:rPr sz="1575" b="0">
-                <a:solidFill>
-                  <a:srgbClr val="8ABFFF"/>
-                </a:solidFill>
-                <a:latin typeface="나눔고딕코딩"/>
-                <a:ea typeface="나눔고딕코딩"/>
-                <a:cs typeface="나눔고딕코딩"/>
-              </a:rPr>
-              <a:t>&lt;/ul</a:t>
-            </a:r>
-            <a:r>
-              <a:rPr sz="1575" b="0">
-                <a:solidFill>
-                  <a:srgbClr val="8ABFFF"/>
-                </a:solidFill>
-                <a:latin typeface="나눔고딕코딩"/>
-                <a:ea typeface="나눔고딕코딩"/>
-                <a:cs typeface="나눔고딕코딩"/>
-              </a:rPr>
-              <a:t>&gt;</a:t>
-            </a:r>
-          </a:p>
-          <a:p>
-            <a:pPr algn="l">
-              <a:lnSpc>
-                <a:spcPct val="115000"/>
-              </a:lnSpc>
-            </a:pPr>
-            <a:r>
-              <a:rPr sz="1575" b="0">
-                <a:solidFill>
-                  <a:srgbClr val="8ABFFF"/>
-                </a:solidFill>
-                <a:latin typeface="나눔고딕코딩"/>
-                <a:ea typeface="나눔고딕코딩"/>
-                <a:cs typeface="나눔고딕코딩"/>
-              </a:rPr>
-              <a:t>&lt;/body</a:t>
-            </a:r>
-            <a:r>
-              <a:rPr sz="1575" b="0">
-                <a:solidFill>
-                  <a:srgbClr val="8ABFFF"/>
-                </a:solidFill>
-                <a:latin typeface="나눔고딕코딩"/>
-                <a:ea typeface="나눔고딕코딩"/>
-                <a:cs typeface="나눔고딕코딩"/>
-              </a:rPr>
-              <a:t>&gt;</a:t>
-            </a:r>
-          </a:p>
-          <a:p>
-            <a:pPr algn="l">
-              <a:lnSpc>
-                <a:spcPct val="115000"/>
-              </a:lnSpc>
-            </a:pPr>
-            <a:r>
-              <a:rPr sz="1575" b="0">
-                <a:solidFill>
-                  <a:srgbClr val="E6EAF2"/>
-                </a:solidFill>
-                <a:latin typeface="나눔고딕코딩"/>
-                <a:ea typeface="나눔고딕코딩"/>
-                <a:cs typeface="나눔고딕코딩"/>
-              </a:rPr>
-              <a:t/>
-            </a:r>
-          </a:p>
-          <a:p>
-            <a:pPr algn="l">
-              <a:lnSpc>
-                <a:spcPct val="115000"/>
-              </a:lnSpc>
-            </a:pPr>
-            <a:r>
-              <a:rPr sz="1575" b="0">
-                <a:solidFill>
-                  <a:srgbClr val="E6EAF2"/>
-                </a:solidFill>
-                <a:latin typeface="나눔고딕코딩"/>
-                <a:ea typeface="나눔고딕코딩"/>
-                <a:cs typeface="나눔고딕코딩"/>
-              </a:rPr>
-              <a:t>/* 브라우저가 만든 DOM 나무</a:t>
-            </a:r>
-          </a:p>
-          <a:p>
-            <a:pPr algn="l">
-              <a:lnSpc>
-                <a:spcPct val="115000"/>
-              </a:lnSpc>
-            </a:pPr>
-            <a:r>
-              <a:rPr sz="1575" b="0">
-                <a:solidFill>
-                  <a:srgbClr val="E6EAF2"/>
-                </a:solidFill>
-                <a:latin typeface="나눔고딕코딩"/>
-                <a:ea typeface="나눔고딕코딩"/>
-                <a:cs typeface="나눔고딕코딩"/>
-              </a:rPr>
-              <a:t>document</a:t>
-            </a:r>
-          </a:p>
-          <a:p>
-            <a:pPr algn="l">
-              <a:lnSpc>
-                <a:spcPct val="115000"/>
-              </a:lnSpc>
-            </a:pPr>
-            <a:r>
-              <a:rPr sz="1575" b="0">
-                <a:solidFill>
-                  <a:srgbClr val="E6EAF2"/>
-                </a:solidFill>
-                <a:latin typeface="나눔고딕코딩"/>
-                <a:ea typeface="나눔고딕코딩"/>
-                <a:cs typeface="나눔고딕코딩"/>
-              </a:rPr>
-              <a:t>└── html</a:t>
-            </a:r>
-          </a:p>
-          <a:p>
-            <a:pPr algn="l">
-              <a:lnSpc>
-                <a:spcPct val="115000"/>
-              </a:lnSpc>
-            </a:pPr>
-            <a:r>
-              <a:rPr sz="1575" b="0">
-                <a:solidFill>
-                  <a:srgbClr val="E6EAF2"/>
-                </a:solidFill>
-                <a:latin typeface="나눔고딕코딩"/>
-                <a:ea typeface="나눔고딕코딩"/>
-                <a:cs typeface="나눔고딕코딩"/>
-              </a:rPr>
-              <a:t>    └── body</a:t>
-            </a:r>
-          </a:p>
-          <a:p>
-            <a:pPr algn="l">
-              <a:lnSpc>
-                <a:spcPct val="115000"/>
-              </a:lnSpc>
-            </a:pPr>
-            <a:r>
-              <a:rPr sz="1575" b="0">
-                <a:solidFill>
-                  <a:srgbClr val="E6EAF2"/>
-                </a:solidFill>
-                <a:latin typeface="나눔고딕코딩"/>
-                <a:ea typeface="나눔고딕코딩"/>
-                <a:cs typeface="나눔고딕코딩"/>
-              </a:rPr>
-              <a:t>        ├── h1#title</a:t>
-            </a:r>
-          </a:p>
-          <a:p>
-            <a:pPr algn="l">
-              <a:lnSpc>
-                <a:spcPct val="115000"/>
-              </a:lnSpc>
-            </a:pPr>
-            <a:r>
-              <a:rPr sz="1575" b="0">
-                <a:solidFill>
-                  <a:srgbClr val="E6EAF2"/>
-                </a:solidFill>
-                <a:latin typeface="나눔고딕코딩"/>
-                <a:ea typeface="나눔고딕코딩"/>
-                <a:cs typeface="나눔고딕코딩"/>
-              </a:rPr>
-              <a:t>        │   └── </a:t>
-            </a:r>
-            <a:r>
-              <a:rPr sz="1575" b="0">
-                <a:solidFill>
-                  <a:srgbClr val="F5C97A"/>
-                </a:solidFill>
-                <a:latin typeface="나눔고딕코딩"/>
-                <a:ea typeface="나눔고딕코딩"/>
-                <a:cs typeface="나눔고딕코딩"/>
-              </a:rPr>
-              <a:t>"제목"</a:t>
-            </a:r>
-            <a:r>
-              <a:rPr sz="1575" b="0">
-                <a:solidFill>
-                  <a:srgbClr val="E6EAF2"/>
-                </a:solidFill>
-                <a:latin typeface="나눔고딕코딩"/>
-                <a:ea typeface="나눔고딕코딩"/>
-                <a:cs typeface="나눔고딕코딩"/>
-              </a:rPr>
-              <a:t>           ← 텍스트 노드</a:t>
-            </a:r>
-          </a:p>
-          <a:p>
-            <a:pPr algn="l">
-              <a:lnSpc>
-                <a:spcPct val="115000"/>
-              </a:lnSpc>
-            </a:pPr>
-            <a:r>
-              <a:rPr sz="1575" b="0">
-                <a:solidFill>
-                  <a:srgbClr val="E6EAF2"/>
-                </a:solidFill>
-                <a:latin typeface="나눔고딕코딩"/>
-                <a:ea typeface="나눔고딕코딩"/>
-                <a:cs typeface="나눔고딕코딩"/>
-              </a:rPr>
-              <a:t>        └── ul.list</a:t>
-            </a:r>
-          </a:p>
-          <a:p>
-            <a:pPr algn="l">
-              <a:lnSpc>
-                <a:spcPct val="115000"/>
-              </a:lnSpc>
-            </a:pPr>
-            <a:r>
-              <a:rPr sz="1575" b="0">
-                <a:solidFill>
-                  <a:srgbClr val="E6EAF2"/>
-                </a:solidFill>
-                <a:latin typeface="나눔고딕코딩"/>
-                <a:ea typeface="나눔고딕코딩"/>
-                <a:cs typeface="나눔고딕코딩"/>
-              </a:rPr>
-              <a:t>            ├── li → </a:t>
-            </a:r>
-            <a:r>
-              <a:rPr sz="1575" b="0">
-                <a:solidFill>
-                  <a:srgbClr val="F5C97A"/>
-                </a:solidFill>
-                <a:latin typeface="나눔고딕코딩"/>
-                <a:ea typeface="나눔고딕코딩"/>
-                <a:cs typeface="나눔고딕코딩"/>
-              </a:rPr>
-              <a:t>"하나"</a:t>
-            </a:r>
-          </a:p>
-          <a:p>
-            <a:pPr algn="l">
-              <a:lnSpc>
-                <a:spcPct val="115000"/>
-              </a:lnSpc>
-            </a:pPr>
-            <a:r>
-              <a:rPr sz="1575" b="0">
-                <a:solidFill>
-                  <a:srgbClr val="E6EAF2"/>
-                </a:solidFill>
-                <a:latin typeface="나눔고딕코딩"/>
-                <a:ea typeface="나눔고딕코딩"/>
-                <a:cs typeface="나눔고딕코딩"/>
-              </a:rPr>
-              <a:t>            └── li → </a:t>
-            </a:r>
-            <a:r>
-              <a:rPr sz="1575" b="0">
-                <a:solidFill>
-                  <a:srgbClr val="F5C97A"/>
-                </a:solidFill>
-                <a:latin typeface="나눔고딕코딩"/>
-                <a:ea typeface="나눔고딕코딩"/>
-                <a:cs typeface="나눔고딕코딩"/>
-              </a:rPr>
-              <a:t>"둘"</a:t>
-            </a:r>
-            <a:r>
-              <a:rPr sz="1575" b="0">
-                <a:solidFill>
-                  <a:srgbClr val="E6EAF2"/>
-                </a:solidFill>
-                <a:latin typeface="나눔고딕코딩"/>
-                <a:ea typeface="나눔고딕코딩"/>
-                <a:cs typeface="나눔고딕코딩"/>
-              </a:rPr>
-              <a:t>        */</a:t>
-            </a:r>
-          </a:p>
-        </p:txBody>
-      </p:sp>
+            <a:ext cx="4257675" cy="4976812"/>
+          </a:xfrm>
+          <a:prstGeom prst="rect">
+            <a:avLst/>
+          </a:prstGeom>
+        </p:spPr>
+      </p:pic>
       <p:sp>
         <p:nvSpPr>
           <p:cNvPr id="12" name="Rectangle 11"/>
